--- a/宣道詩/(宣道詩70)跟隨耶穌.pptx
+++ b/宣道詩/(宣道詩70)跟隨耶穌.pptx
@@ -173,10 +173,9 @@
           <a:lstStyle/>
           <a:p>
             <a:r>
-              <a:rPr lang="zh-TW" altLang="en-US" smtClean="0"/>
+              <a:rPr lang="zh-TW" altLang="en-US"/>
               <a:t>按一下以編輯母片標題樣式</a:t>
             </a:r>
-            <a:endParaRPr lang="zh-TW" altLang="en-US"/>
           </a:p>
         </p:txBody>
       </p:sp>
@@ -292,10 +291,9 @@
           </a:lstStyle>
           <a:p>
             <a:r>
-              <a:rPr lang="zh-TW" altLang="en-US" smtClean="0"/>
+              <a:rPr lang="zh-TW" altLang="en-US"/>
               <a:t>按一下以編輯母片副標題樣式</a:t>
             </a:r>
-            <a:endParaRPr lang="zh-TW" altLang="en-US"/>
           </a:p>
         </p:txBody>
       </p:sp>
@@ -317,7 +315,7 @@
             <a:fld id="{F11B267C-8ABF-4E90-A769-D7CEAE6F8AA0}" type="datetimeFigureOut">
               <a:rPr lang="zh-TW" altLang="en-US" smtClean="0"/>
               <a:pPr/>
-              <a:t>2021/1/23</a:t>
+              <a:t>2024/5/4</a:t>
             </a:fld>
             <a:endParaRPr lang="zh-TW" altLang="en-US"/>
           </a:p>
@@ -407,10 +405,9 @@
           <a:lstStyle/>
           <a:p>
             <a:r>
-              <a:rPr lang="zh-TW" altLang="en-US" smtClean="0"/>
+              <a:rPr lang="zh-TW" altLang="en-US"/>
               <a:t>按一下以編輯母片標題樣式</a:t>
             </a:r>
-            <a:endParaRPr lang="zh-TW" altLang="en-US"/>
           </a:p>
         </p:txBody>
       </p:sp>
@@ -431,38 +428,37 @@
           <a:p>
             <a:pPr lvl="0"/>
             <a:r>
-              <a:rPr lang="zh-TW" altLang="en-US" smtClean="0"/>
+              <a:rPr lang="zh-TW" altLang="en-US"/>
               <a:t>按一下以編輯母片文字樣式</a:t>
             </a:r>
           </a:p>
           <a:p>
             <a:pPr lvl="1"/>
             <a:r>
-              <a:rPr lang="zh-TW" altLang="en-US" smtClean="0"/>
+              <a:rPr lang="zh-TW" altLang="en-US"/>
               <a:t>第二層</a:t>
             </a:r>
           </a:p>
           <a:p>
             <a:pPr lvl="2"/>
             <a:r>
-              <a:rPr lang="zh-TW" altLang="en-US" smtClean="0"/>
+              <a:rPr lang="zh-TW" altLang="en-US"/>
               <a:t>第三層</a:t>
             </a:r>
           </a:p>
           <a:p>
             <a:pPr lvl="3"/>
             <a:r>
-              <a:rPr lang="zh-TW" altLang="en-US" smtClean="0"/>
+              <a:rPr lang="zh-TW" altLang="en-US"/>
               <a:t>第四層</a:t>
             </a:r>
           </a:p>
           <a:p>
             <a:pPr lvl="4"/>
             <a:r>
-              <a:rPr lang="zh-TW" altLang="en-US" smtClean="0"/>
+              <a:rPr lang="zh-TW" altLang="en-US"/>
               <a:t>第五層</a:t>
             </a:r>
-            <a:endParaRPr lang="zh-TW" altLang="en-US"/>
           </a:p>
         </p:txBody>
       </p:sp>
@@ -484,7 +480,7 @@
             <a:fld id="{F11B267C-8ABF-4E90-A769-D7CEAE6F8AA0}" type="datetimeFigureOut">
               <a:rPr lang="zh-TW" altLang="en-US" smtClean="0"/>
               <a:pPr/>
-              <a:t>2021/1/23</a:t>
+              <a:t>2024/5/4</a:t>
             </a:fld>
             <a:endParaRPr lang="zh-TW" altLang="en-US"/>
           </a:p>
@@ -579,10 +575,9 @@
           <a:lstStyle/>
           <a:p>
             <a:r>
-              <a:rPr lang="zh-TW" altLang="en-US" smtClean="0"/>
+              <a:rPr lang="zh-TW" altLang="en-US"/>
               <a:t>按一下以編輯母片標題樣式</a:t>
             </a:r>
-            <a:endParaRPr lang="zh-TW" altLang="en-US"/>
           </a:p>
         </p:txBody>
       </p:sp>
@@ -608,38 +603,37 @@
           <a:p>
             <a:pPr lvl="0"/>
             <a:r>
-              <a:rPr lang="zh-TW" altLang="en-US" smtClean="0"/>
+              <a:rPr lang="zh-TW" altLang="en-US"/>
               <a:t>按一下以編輯母片文字樣式</a:t>
             </a:r>
           </a:p>
           <a:p>
             <a:pPr lvl="1"/>
             <a:r>
-              <a:rPr lang="zh-TW" altLang="en-US" smtClean="0"/>
+              <a:rPr lang="zh-TW" altLang="en-US"/>
               <a:t>第二層</a:t>
             </a:r>
           </a:p>
           <a:p>
             <a:pPr lvl="2"/>
             <a:r>
-              <a:rPr lang="zh-TW" altLang="en-US" smtClean="0"/>
+              <a:rPr lang="zh-TW" altLang="en-US"/>
               <a:t>第三層</a:t>
             </a:r>
           </a:p>
           <a:p>
             <a:pPr lvl="3"/>
             <a:r>
-              <a:rPr lang="zh-TW" altLang="en-US" smtClean="0"/>
+              <a:rPr lang="zh-TW" altLang="en-US"/>
               <a:t>第四層</a:t>
             </a:r>
           </a:p>
           <a:p>
             <a:pPr lvl="4"/>
             <a:r>
-              <a:rPr lang="zh-TW" altLang="en-US" smtClean="0"/>
+              <a:rPr lang="zh-TW" altLang="en-US"/>
               <a:t>第五層</a:t>
             </a:r>
-            <a:endParaRPr lang="zh-TW" altLang="en-US"/>
           </a:p>
         </p:txBody>
       </p:sp>
@@ -661,7 +655,7 @@
             <a:fld id="{F11B267C-8ABF-4E90-A769-D7CEAE6F8AA0}" type="datetimeFigureOut">
               <a:rPr lang="zh-TW" altLang="en-US" smtClean="0"/>
               <a:pPr/>
-              <a:t>2021/1/23</a:t>
+              <a:t>2024/5/4</a:t>
             </a:fld>
             <a:endParaRPr lang="zh-TW" altLang="en-US"/>
           </a:p>
@@ -751,10 +745,9 @@
           <a:lstStyle/>
           <a:p>
             <a:r>
-              <a:rPr lang="zh-TW" altLang="en-US" smtClean="0"/>
+              <a:rPr lang="zh-TW" altLang="en-US"/>
               <a:t>按一下以編輯母片標題樣式</a:t>
             </a:r>
-            <a:endParaRPr lang="zh-TW" altLang="en-US"/>
           </a:p>
         </p:txBody>
       </p:sp>
@@ -775,38 +768,37 @@
           <a:p>
             <a:pPr lvl="0"/>
             <a:r>
-              <a:rPr lang="zh-TW" altLang="en-US" smtClean="0"/>
+              <a:rPr lang="zh-TW" altLang="en-US"/>
               <a:t>按一下以編輯母片文字樣式</a:t>
             </a:r>
           </a:p>
           <a:p>
             <a:pPr lvl="1"/>
             <a:r>
-              <a:rPr lang="zh-TW" altLang="en-US" smtClean="0"/>
+              <a:rPr lang="zh-TW" altLang="en-US"/>
               <a:t>第二層</a:t>
             </a:r>
           </a:p>
           <a:p>
             <a:pPr lvl="2"/>
             <a:r>
-              <a:rPr lang="zh-TW" altLang="en-US" smtClean="0"/>
+              <a:rPr lang="zh-TW" altLang="en-US"/>
               <a:t>第三層</a:t>
             </a:r>
           </a:p>
           <a:p>
             <a:pPr lvl="3"/>
             <a:r>
-              <a:rPr lang="zh-TW" altLang="en-US" smtClean="0"/>
+              <a:rPr lang="zh-TW" altLang="en-US"/>
               <a:t>第四層</a:t>
             </a:r>
           </a:p>
           <a:p>
             <a:pPr lvl="4"/>
             <a:r>
-              <a:rPr lang="zh-TW" altLang="en-US" smtClean="0"/>
+              <a:rPr lang="zh-TW" altLang="en-US"/>
               <a:t>第五層</a:t>
             </a:r>
-            <a:endParaRPr lang="zh-TW" altLang="en-US"/>
           </a:p>
         </p:txBody>
       </p:sp>
@@ -828,7 +820,7 @@
             <a:fld id="{F11B267C-8ABF-4E90-A769-D7CEAE6F8AA0}" type="datetimeFigureOut">
               <a:rPr lang="zh-TW" altLang="en-US" smtClean="0"/>
               <a:pPr/>
-              <a:t>2021/1/23</a:t>
+              <a:t>2024/5/4</a:t>
             </a:fld>
             <a:endParaRPr lang="zh-TW" altLang="en-US"/>
           </a:p>
@@ -927,10 +919,9 @@
           </a:lstStyle>
           <a:p>
             <a:r>
-              <a:rPr lang="zh-TW" altLang="en-US" smtClean="0"/>
+              <a:rPr lang="zh-TW" altLang="en-US"/>
               <a:t>按一下以編輯母片標題樣式</a:t>
             </a:r>
-            <a:endParaRPr lang="zh-TW" altLang="en-US"/>
           </a:p>
         </p:txBody>
       </p:sp>
@@ -1047,7 +1038,7 @@
           <a:p>
             <a:pPr lvl="0"/>
             <a:r>
-              <a:rPr lang="zh-TW" altLang="en-US" smtClean="0"/>
+              <a:rPr lang="zh-TW" altLang="en-US"/>
               <a:t>按一下以編輯母片文字樣式</a:t>
             </a:r>
           </a:p>
@@ -1071,7 +1062,7 @@
             <a:fld id="{F11B267C-8ABF-4E90-A769-D7CEAE6F8AA0}" type="datetimeFigureOut">
               <a:rPr lang="zh-TW" altLang="en-US" smtClean="0"/>
               <a:pPr/>
-              <a:t>2021/1/23</a:t>
+              <a:t>2024/5/4</a:t>
             </a:fld>
             <a:endParaRPr lang="zh-TW" altLang="en-US"/>
           </a:p>
@@ -1161,10 +1152,9 @@
           <a:lstStyle/>
           <a:p>
             <a:r>
-              <a:rPr lang="zh-TW" altLang="en-US" smtClean="0"/>
+              <a:rPr lang="zh-TW" altLang="en-US"/>
               <a:t>按一下以編輯母片標題樣式</a:t>
             </a:r>
-            <a:endParaRPr lang="zh-TW" altLang="en-US"/>
           </a:p>
         </p:txBody>
       </p:sp>
@@ -1218,38 +1208,37 @@
           <a:p>
             <a:pPr lvl="0"/>
             <a:r>
-              <a:rPr lang="zh-TW" altLang="en-US" smtClean="0"/>
+              <a:rPr lang="zh-TW" altLang="en-US"/>
               <a:t>按一下以編輯母片文字樣式</a:t>
             </a:r>
           </a:p>
           <a:p>
             <a:pPr lvl="1"/>
             <a:r>
-              <a:rPr lang="zh-TW" altLang="en-US" smtClean="0"/>
+              <a:rPr lang="zh-TW" altLang="en-US"/>
               <a:t>第二層</a:t>
             </a:r>
           </a:p>
           <a:p>
             <a:pPr lvl="2"/>
             <a:r>
-              <a:rPr lang="zh-TW" altLang="en-US" smtClean="0"/>
+              <a:rPr lang="zh-TW" altLang="en-US"/>
               <a:t>第三層</a:t>
             </a:r>
           </a:p>
           <a:p>
             <a:pPr lvl="3"/>
             <a:r>
-              <a:rPr lang="zh-TW" altLang="en-US" smtClean="0"/>
+              <a:rPr lang="zh-TW" altLang="en-US"/>
               <a:t>第四層</a:t>
             </a:r>
           </a:p>
           <a:p>
             <a:pPr lvl="4"/>
             <a:r>
-              <a:rPr lang="zh-TW" altLang="en-US" smtClean="0"/>
+              <a:rPr lang="zh-TW" altLang="en-US"/>
               <a:t>第五層</a:t>
             </a:r>
-            <a:endParaRPr lang="zh-TW" altLang="en-US"/>
           </a:p>
         </p:txBody>
       </p:sp>
@@ -1303,38 +1292,37 @@
           <a:p>
             <a:pPr lvl="0"/>
             <a:r>
-              <a:rPr lang="zh-TW" altLang="en-US" smtClean="0"/>
+              <a:rPr lang="zh-TW" altLang="en-US"/>
               <a:t>按一下以編輯母片文字樣式</a:t>
             </a:r>
           </a:p>
           <a:p>
             <a:pPr lvl="1"/>
             <a:r>
-              <a:rPr lang="zh-TW" altLang="en-US" smtClean="0"/>
+              <a:rPr lang="zh-TW" altLang="en-US"/>
               <a:t>第二層</a:t>
             </a:r>
           </a:p>
           <a:p>
             <a:pPr lvl="2"/>
             <a:r>
-              <a:rPr lang="zh-TW" altLang="en-US" smtClean="0"/>
+              <a:rPr lang="zh-TW" altLang="en-US"/>
               <a:t>第三層</a:t>
             </a:r>
           </a:p>
           <a:p>
             <a:pPr lvl="3"/>
             <a:r>
-              <a:rPr lang="zh-TW" altLang="en-US" smtClean="0"/>
+              <a:rPr lang="zh-TW" altLang="en-US"/>
               <a:t>第四層</a:t>
             </a:r>
           </a:p>
           <a:p>
             <a:pPr lvl="4"/>
             <a:r>
-              <a:rPr lang="zh-TW" altLang="en-US" smtClean="0"/>
+              <a:rPr lang="zh-TW" altLang="en-US"/>
               <a:t>第五層</a:t>
             </a:r>
-            <a:endParaRPr lang="zh-TW" altLang="en-US"/>
           </a:p>
         </p:txBody>
       </p:sp>
@@ -1356,7 +1344,7 @@
             <a:fld id="{F11B267C-8ABF-4E90-A769-D7CEAE6F8AA0}" type="datetimeFigureOut">
               <a:rPr lang="zh-TW" altLang="en-US" smtClean="0"/>
               <a:pPr/>
-              <a:t>2021/1/23</a:t>
+              <a:t>2024/5/4</a:t>
             </a:fld>
             <a:endParaRPr lang="zh-TW" altLang="en-US"/>
           </a:p>
@@ -1450,10 +1438,9 @@
           </a:lstStyle>
           <a:p>
             <a:r>
-              <a:rPr lang="zh-TW" altLang="en-US" smtClean="0"/>
+              <a:rPr lang="zh-TW" altLang="en-US"/>
               <a:t>按一下以編輯母片標題樣式</a:t>
             </a:r>
-            <a:endParaRPr lang="zh-TW" altLang="en-US"/>
           </a:p>
         </p:txBody>
       </p:sp>
@@ -1516,7 +1503,7 @@
           <a:p>
             <a:pPr lvl="0"/>
             <a:r>
-              <a:rPr lang="zh-TW" altLang="en-US" smtClean="0"/>
+              <a:rPr lang="zh-TW" altLang="en-US"/>
               <a:t>按一下以編輯母片文字樣式</a:t>
             </a:r>
           </a:p>
@@ -1572,38 +1559,37 @@
           <a:p>
             <a:pPr lvl="0"/>
             <a:r>
-              <a:rPr lang="zh-TW" altLang="en-US" smtClean="0"/>
+              <a:rPr lang="zh-TW" altLang="en-US"/>
               <a:t>按一下以編輯母片文字樣式</a:t>
             </a:r>
           </a:p>
           <a:p>
             <a:pPr lvl="1"/>
             <a:r>
-              <a:rPr lang="zh-TW" altLang="en-US" smtClean="0"/>
+              <a:rPr lang="zh-TW" altLang="en-US"/>
               <a:t>第二層</a:t>
             </a:r>
           </a:p>
           <a:p>
             <a:pPr lvl="2"/>
             <a:r>
-              <a:rPr lang="zh-TW" altLang="en-US" smtClean="0"/>
+              <a:rPr lang="zh-TW" altLang="en-US"/>
               <a:t>第三層</a:t>
             </a:r>
           </a:p>
           <a:p>
             <a:pPr lvl="3"/>
             <a:r>
-              <a:rPr lang="zh-TW" altLang="en-US" smtClean="0"/>
+              <a:rPr lang="zh-TW" altLang="en-US"/>
               <a:t>第四層</a:t>
             </a:r>
           </a:p>
           <a:p>
             <a:pPr lvl="4"/>
             <a:r>
-              <a:rPr lang="zh-TW" altLang="en-US" smtClean="0"/>
+              <a:rPr lang="zh-TW" altLang="en-US"/>
               <a:t>第五層</a:t>
             </a:r>
-            <a:endParaRPr lang="zh-TW" altLang="en-US"/>
           </a:p>
         </p:txBody>
       </p:sp>
@@ -1666,7 +1652,7 @@
           <a:p>
             <a:pPr lvl="0"/>
             <a:r>
-              <a:rPr lang="zh-TW" altLang="en-US" smtClean="0"/>
+              <a:rPr lang="zh-TW" altLang="en-US"/>
               <a:t>按一下以編輯母片文字樣式</a:t>
             </a:r>
           </a:p>
@@ -1722,38 +1708,37 @@
           <a:p>
             <a:pPr lvl="0"/>
             <a:r>
-              <a:rPr lang="zh-TW" altLang="en-US" smtClean="0"/>
+              <a:rPr lang="zh-TW" altLang="en-US"/>
               <a:t>按一下以編輯母片文字樣式</a:t>
             </a:r>
           </a:p>
           <a:p>
             <a:pPr lvl="1"/>
             <a:r>
-              <a:rPr lang="zh-TW" altLang="en-US" smtClean="0"/>
+              <a:rPr lang="zh-TW" altLang="en-US"/>
               <a:t>第二層</a:t>
             </a:r>
           </a:p>
           <a:p>
             <a:pPr lvl="2"/>
             <a:r>
-              <a:rPr lang="zh-TW" altLang="en-US" smtClean="0"/>
+              <a:rPr lang="zh-TW" altLang="en-US"/>
               <a:t>第三層</a:t>
             </a:r>
           </a:p>
           <a:p>
             <a:pPr lvl="3"/>
             <a:r>
-              <a:rPr lang="zh-TW" altLang="en-US" smtClean="0"/>
+              <a:rPr lang="zh-TW" altLang="en-US"/>
               <a:t>第四層</a:t>
             </a:r>
           </a:p>
           <a:p>
             <a:pPr lvl="4"/>
             <a:r>
-              <a:rPr lang="zh-TW" altLang="en-US" smtClean="0"/>
+              <a:rPr lang="zh-TW" altLang="en-US"/>
               <a:t>第五層</a:t>
             </a:r>
-            <a:endParaRPr lang="zh-TW" altLang="en-US"/>
           </a:p>
         </p:txBody>
       </p:sp>
@@ -1775,7 +1760,7 @@
             <a:fld id="{F11B267C-8ABF-4E90-A769-D7CEAE6F8AA0}" type="datetimeFigureOut">
               <a:rPr lang="zh-TW" altLang="en-US" smtClean="0"/>
               <a:pPr/>
-              <a:t>2021/1/23</a:t>
+              <a:t>2024/5/4</a:t>
             </a:fld>
             <a:endParaRPr lang="zh-TW" altLang="en-US"/>
           </a:p>
@@ -1865,10 +1850,9 @@
           <a:lstStyle/>
           <a:p>
             <a:r>
-              <a:rPr lang="zh-TW" altLang="en-US" smtClean="0"/>
+              <a:rPr lang="zh-TW" altLang="en-US"/>
               <a:t>按一下以編輯母片標題樣式</a:t>
             </a:r>
-            <a:endParaRPr lang="zh-TW" altLang="en-US"/>
           </a:p>
         </p:txBody>
       </p:sp>
@@ -1890,7 +1874,7 @@
             <a:fld id="{F11B267C-8ABF-4E90-A769-D7CEAE6F8AA0}" type="datetimeFigureOut">
               <a:rPr lang="zh-TW" altLang="en-US" smtClean="0"/>
               <a:pPr/>
-              <a:t>2021/1/23</a:t>
+              <a:t>2024/5/4</a:t>
             </a:fld>
             <a:endParaRPr lang="zh-TW" altLang="en-US"/>
           </a:p>
@@ -1982,7 +1966,7 @@
             <a:fld id="{F11B267C-8ABF-4E90-A769-D7CEAE6F8AA0}" type="datetimeFigureOut">
               <a:rPr lang="zh-TW" altLang="en-US" smtClean="0"/>
               <a:pPr/>
-              <a:t>2021/1/23</a:t>
+              <a:t>2024/5/4</a:t>
             </a:fld>
             <a:endParaRPr lang="zh-TW" altLang="en-US"/>
           </a:p>
@@ -2081,10 +2065,9 @@
           </a:lstStyle>
           <a:p>
             <a:r>
-              <a:rPr lang="zh-TW" altLang="en-US" smtClean="0"/>
+              <a:rPr lang="zh-TW" altLang="en-US"/>
               <a:t>按一下以編輯母片標題樣式</a:t>
             </a:r>
-            <a:endParaRPr lang="zh-TW" altLang="en-US"/>
           </a:p>
         </p:txBody>
       </p:sp>
@@ -2138,38 +2121,37 @@
           <a:p>
             <a:pPr lvl="0"/>
             <a:r>
-              <a:rPr lang="zh-TW" altLang="en-US" smtClean="0"/>
+              <a:rPr lang="zh-TW" altLang="en-US"/>
               <a:t>按一下以編輯母片文字樣式</a:t>
             </a:r>
           </a:p>
           <a:p>
             <a:pPr lvl="1"/>
             <a:r>
-              <a:rPr lang="zh-TW" altLang="en-US" smtClean="0"/>
+              <a:rPr lang="zh-TW" altLang="en-US"/>
               <a:t>第二層</a:t>
             </a:r>
           </a:p>
           <a:p>
             <a:pPr lvl="2"/>
             <a:r>
-              <a:rPr lang="zh-TW" altLang="en-US" smtClean="0"/>
+              <a:rPr lang="zh-TW" altLang="en-US"/>
               <a:t>第三層</a:t>
             </a:r>
           </a:p>
           <a:p>
             <a:pPr lvl="3"/>
             <a:r>
-              <a:rPr lang="zh-TW" altLang="en-US" smtClean="0"/>
+              <a:rPr lang="zh-TW" altLang="en-US"/>
               <a:t>第四層</a:t>
             </a:r>
           </a:p>
           <a:p>
             <a:pPr lvl="4"/>
             <a:r>
-              <a:rPr lang="zh-TW" altLang="en-US" smtClean="0"/>
+              <a:rPr lang="zh-TW" altLang="en-US"/>
               <a:t>第五層</a:t>
             </a:r>
-            <a:endParaRPr lang="zh-TW" altLang="en-US"/>
           </a:p>
         </p:txBody>
       </p:sp>
@@ -2232,7 +2214,7 @@
           <a:p>
             <a:pPr lvl="0"/>
             <a:r>
-              <a:rPr lang="zh-TW" altLang="en-US" smtClean="0"/>
+              <a:rPr lang="zh-TW" altLang="en-US"/>
               <a:t>按一下以編輯母片文字樣式</a:t>
             </a:r>
           </a:p>
@@ -2256,7 +2238,7 @@
             <a:fld id="{F11B267C-8ABF-4E90-A769-D7CEAE6F8AA0}" type="datetimeFigureOut">
               <a:rPr lang="zh-TW" altLang="en-US" smtClean="0"/>
               <a:pPr/>
-              <a:t>2021/1/23</a:t>
+              <a:t>2024/5/4</a:t>
             </a:fld>
             <a:endParaRPr lang="zh-TW" altLang="en-US"/>
           </a:p>
@@ -2355,10 +2337,9 @@
           </a:lstStyle>
           <a:p>
             <a:r>
-              <a:rPr lang="zh-TW" altLang="en-US" smtClean="0"/>
+              <a:rPr lang="zh-TW" altLang="en-US"/>
               <a:t>按一下以編輯母片標題樣式</a:t>
             </a:r>
-            <a:endParaRPr lang="zh-TW" altLang="en-US"/>
           </a:p>
         </p:txBody>
       </p:sp>
@@ -2420,10 +2401,9 @@
           </a:lstStyle>
           <a:p>
             <a:r>
-              <a:rPr lang="zh-TW" altLang="en-US" smtClean="0"/>
+              <a:rPr lang="zh-TW" altLang="en-US"/>
               <a:t>按一下圖示以新增圖片</a:t>
             </a:r>
-            <a:endParaRPr lang="zh-TW" altLang="en-US"/>
           </a:p>
         </p:txBody>
       </p:sp>
@@ -2486,7 +2466,7 @@
           <a:p>
             <a:pPr lvl="0"/>
             <a:r>
-              <a:rPr lang="zh-TW" altLang="en-US" smtClean="0"/>
+              <a:rPr lang="zh-TW" altLang="en-US"/>
               <a:t>按一下以編輯母片文字樣式</a:t>
             </a:r>
           </a:p>
@@ -2510,7 +2490,7 @@
             <a:fld id="{F11B267C-8ABF-4E90-A769-D7CEAE6F8AA0}" type="datetimeFigureOut">
               <a:rPr lang="zh-TW" altLang="en-US" smtClean="0"/>
               <a:pPr/>
-              <a:t>2021/1/23</a:t>
+              <a:t>2024/5/4</a:t>
             </a:fld>
             <a:endParaRPr lang="zh-TW" altLang="en-US"/>
           </a:p>
@@ -2620,10 +2600,9 @@
           <a:lstStyle/>
           <a:p>
             <a:r>
-              <a:rPr lang="zh-TW" altLang="en-US" smtClean="0"/>
+              <a:rPr lang="zh-TW" altLang="en-US"/>
               <a:t>按一下以編輯母片標題樣式</a:t>
             </a:r>
-            <a:endParaRPr lang="zh-TW" altLang="en-US"/>
           </a:p>
         </p:txBody>
       </p:sp>
@@ -2654,38 +2633,37 @@
           <a:p>
             <a:pPr lvl="0"/>
             <a:r>
-              <a:rPr lang="zh-TW" altLang="en-US" smtClean="0"/>
+              <a:rPr lang="zh-TW" altLang="en-US"/>
               <a:t>按一下以編輯母片文字樣式</a:t>
             </a:r>
           </a:p>
           <a:p>
             <a:pPr lvl="1"/>
             <a:r>
-              <a:rPr lang="zh-TW" altLang="en-US" smtClean="0"/>
+              <a:rPr lang="zh-TW" altLang="en-US"/>
               <a:t>第二層</a:t>
             </a:r>
           </a:p>
           <a:p>
             <a:pPr lvl="2"/>
             <a:r>
-              <a:rPr lang="zh-TW" altLang="en-US" smtClean="0"/>
+              <a:rPr lang="zh-TW" altLang="en-US"/>
               <a:t>第三層</a:t>
             </a:r>
           </a:p>
           <a:p>
             <a:pPr lvl="3"/>
             <a:r>
-              <a:rPr lang="zh-TW" altLang="en-US" smtClean="0"/>
+              <a:rPr lang="zh-TW" altLang="en-US"/>
               <a:t>第四層</a:t>
             </a:r>
           </a:p>
           <a:p>
             <a:pPr lvl="4"/>
             <a:r>
-              <a:rPr lang="zh-TW" altLang="en-US" smtClean="0"/>
+              <a:rPr lang="zh-TW" altLang="en-US"/>
               <a:t>第五層</a:t>
             </a:r>
-            <a:endParaRPr lang="zh-TW" altLang="en-US"/>
           </a:p>
         </p:txBody>
       </p:sp>
@@ -2725,7 +2703,7 @@
             <a:fld id="{F11B267C-8ABF-4E90-A769-D7CEAE6F8AA0}" type="datetimeFigureOut">
               <a:rPr lang="zh-TW" altLang="en-US" smtClean="0"/>
               <a:pPr/>
-              <a:t>2021/1/23</a:t>
+              <a:t>2024/5/4</a:t>
             </a:fld>
             <a:endParaRPr lang="zh-TW" altLang="en-US"/>
           </a:p>
@@ -3152,23 +3130,6 @@
               </a:rPr>
               <a:t>70</a:t>
             </a:r>
-            <a:r>
-              <a:rPr lang="en-US" altLang="zh-CN" sz="7200" b="1" i="1" dirty="0">
-                <a:solidFill>
-                  <a:srgbClr val="660033"/>
-                </a:solidFill>
-                <a:effectLst>
-                  <a:outerShdw blurRad="38100" dist="38100" dir="2700000" algn="tl">
-                    <a:srgbClr val="000000">
-                      <a:alpha val="43137"/>
-                    </a:srgbClr>
-                  </a:outerShdw>
-                </a:effectLst>
-                <a:latin typeface="微軟正黑體" pitchFamily="34" charset="-120"/>
-                <a:ea typeface="微軟正黑體" pitchFamily="34" charset="-120"/>
-              </a:rPr>
-              <a:t/>
-            </a:r>
             <a:br>
               <a:rPr lang="en-US" altLang="zh-CN" sz="7200" b="1" i="1" dirty="0">
                 <a:solidFill>
@@ -3200,24 +3161,7 @@
                 <a:latin typeface="微軟正黑體" pitchFamily="34" charset="-120"/>
                 <a:ea typeface="微軟正黑體" pitchFamily="34" charset="-120"/>
               </a:rPr>
-              <a:t>跟</a:t>
-            </a:r>
-            <a:r>
-              <a:rPr lang="zh-CN" altLang="en-US" sz="8000" b="1" dirty="0">
-                <a:solidFill>
-                  <a:srgbClr val="000066"/>
-                </a:solidFill>
-                <a:effectLst>
-                  <a:outerShdw blurRad="38100" dist="38100" dir="2700000" algn="tl">
-                    <a:srgbClr val="000000">
-                      <a:alpha val="43137"/>
-                    </a:srgbClr>
-                  </a:outerShdw>
-                </a:effectLst>
-                <a:latin typeface="微軟正黑體" pitchFamily="34" charset="-120"/>
-                <a:ea typeface="微軟正黑體" pitchFamily="34" charset="-120"/>
-              </a:rPr>
-              <a:t>隨耶穌</a:t>
+              <a:t>跟隨耶穌</a:t>
             </a:r>
             <a:endParaRPr lang="zh-TW" altLang="en-US" sz="8000" b="1" dirty="0">
               <a:solidFill>
@@ -3246,13 +3190,6 @@
   <p:clrMapOvr>
     <a:masterClrMapping/>
   </p:clrMapOvr>
-  <p:timing>
-    <p:tnLst>
-      <p:par>
-        <p:cTn id="1" dur="indefinite" restart="never" nodeType="tmRoot"/>
-      </p:par>
-    </p:tnLst>
-  </p:timing>
 </p:sld>
 </file>
 
@@ -3349,7 +3286,7 @@
         <p:spPr>
           <a:xfrm>
             <a:off x="0" y="5253203"/>
-            <a:ext cx="12192000" cy="830997"/>
+            <a:ext cx="12192000" cy="646331"/>
           </a:xfrm>
           <a:prstGeom prst="rect">
             <a:avLst/>
@@ -3364,14 +3301,14 @@
           <a:p>
             <a:pPr algn="ctr"/>
             <a:r>
-              <a:rPr lang="en-US" sz="4800" b="1" dirty="0">
+              <a:rPr lang="en-US" sz="3600" b="1" dirty="0">
                 <a:solidFill>
                   <a:srgbClr val="000066"/>
                 </a:solidFill>
               </a:rPr>
-              <a:t>( 3 )</a:t>
-            </a:r>
-            <a:endParaRPr lang="vi-VN" sz="4800" b="1" dirty="0">
+              <a:t>( 3 / 3 )</a:t>
+            </a:r>
+            <a:endParaRPr lang="vi-VN" sz="3600" b="1" dirty="0">
               <a:solidFill>
                 <a:srgbClr val="000066"/>
               </a:solidFill>
@@ -3389,13 +3326,6 @@
   <p:clrMapOvr>
     <a:masterClrMapping/>
   </p:clrMapOvr>
-  <p:timing>
-    <p:tnLst>
-      <p:par>
-        <p:cTn id="1" dur="indefinite" restart="never" nodeType="tmRoot"/>
-      </p:par>
-    </p:tnLst>
-  </p:timing>
 </p:sld>
 </file>
 
@@ -3492,7 +3422,7 @@
         <p:spPr>
           <a:xfrm>
             <a:off x="0" y="5253203"/>
-            <a:ext cx="12192000" cy="830997"/>
+            <a:ext cx="12192000" cy="646331"/>
           </a:xfrm>
           <a:prstGeom prst="rect">
             <a:avLst/>
@@ -3507,14 +3437,14 @@
           <a:p>
             <a:pPr algn="ctr"/>
             <a:r>
-              <a:rPr lang="en-US" sz="4800" b="1" dirty="0">
+              <a:rPr lang="en-US" sz="3600" b="1" dirty="0">
                 <a:solidFill>
                   <a:srgbClr val="000066"/>
                 </a:solidFill>
               </a:rPr>
-              <a:t>( 3 )</a:t>
-            </a:r>
-            <a:endParaRPr lang="vi-VN" sz="4800" b="1" dirty="0">
+              <a:t>( 3 / 3 )</a:t>
+            </a:r>
+            <a:endParaRPr lang="vi-VN" sz="3600" b="1" dirty="0">
               <a:solidFill>
                 <a:srgbClr val="000066"/>
               </a:solidFill>
@@ -3532,13 +3462,6 @@
   <p:clrMapOvr>
     <a:masterClrMapping/>
   </p:clrMapOvr>
-  <p:timing>
-    <p:tnLst>
-      <p:par>
-        <p:cTn id="1" dur="indefinite" restart="never" nodeType="tmRoot"/>
-      </p:par>
-    </p:tnLst>
-  </p:timing>
 </p:sld>
 </file>
 
@@ -3656,13 +3579,6 @@
   <p:clrMapOvr>
     <a:masterClrMapping/>
   </p:clrMapOvr>
-  <p:timing>
-    <p:tnLst>
-      <p:par>
-        <p:cTn id="1" dur="indefinite" restart="never" nodeType="tmRoot"/>
-      </p:par>
-    </p:tnLst>
-  </p:timing>
 </p:sld>
 </file>
 
@@ -3740,13 +3656,6 @@
               </a:rPr>
               <a:t>只望耶穌引導  我必跟隨主</a:t>
             </a:r>
-            <a:endParaRPr lang="zh-TW" altLang="en-US" sz="6400" b="1" dirty="0">
-              <a:solidFill>
-                <a:srgbClr val="000066"/>
-              </a:solidFill>
-              <a:latin typeface="微軟正黑體" pitchFamily="34" charset="-120"/>
-              <a:ea typeface="微軟正黑體" pitchFamily="34" charset="-120"/>
-            </a:endParaRPr>
           </a:p>
         </p:txBody>
       </p:sp>
@@ -3760,13 +3669,6 @@
   <p:clrMapOvr>
     <a:masterClrMapping/>
   </p:clrMapOvr>
-  <p:timing>
-    <p:tnLst>
-      <p:par>
-        <p:cTn id="1" dur="indefinite" restart="never" nodeType="tmRoot"/>
-      </p:par>
-    </p:tnLst>
-  </p:timing>
 </p:sld>
 </file>
 
@@ -3883,7 +3785,7 @@
         <p:spPr>
           <a:xfrm>
             <a:off x="0" y="5253203"/>
-            <a:ext cx="12192000" cy="830997"/>
+            <a:ext cx="12192000" cy="646331"/>
           </a:xfrm>
           <a:prstGeom prst="rect">
             <a:avLst/>
@@ -3898,14 +3800,14 @@
           <a:p>
             <a:pPr algn="ctr"/>
             <a:r>
-              <a:rPr lang="en-US" sz="4800" b="1" dirty="0">
+              <a:rPr lang="en-US" sz="3600" b="1" dirty="0">
                 <a:solidFill>
                   <a:srgbClr val="000066"/>
                 </a:solidFill>
               </a:rPr>
-              <a:t>( 1 )</a:t>
-            </a:r>
-            <a:endParaRPr lang="vi-VN" sz="4800" b="1" dirty="0">
+              <a:t>( 1 / 3 )</a:t>
+            </a:r>
+            <a:endParaRPr lang="vi-VN" sz="3600" b="1" dirty="0">
               <a:solidFill>
                 <a:srgbClr val="000066"/>
               </a:solidFill>
@@ -3923,13 +3825,6 @@
   <p:clrMapOvr>
     <a:masterClrMapping/>
   </p:clrMapOvr>
-  <p:timing>
-    <p:tnLst>
-      <p:par>
-        <p:cTn id="1" dur="indefinite" restart="never" nodeType="tmRoot"/>
-      </p:par>
-    </p:tnLst>
-  </p:timing>
 </p:sld>
 </file>
 
@@ -4026,7 +3921,7 @@
         <p:spPr>
           <a:xfrm>
             <a:off x="0" y="5253203"/>
-            <a:ext cx="12192000" cy="830997"/>
+            <a:ext cx="12192000" cy="646331"/>
           </a:xfrm>
           <a:prstGeom prst="rect">
             <a:avLst/>
@@ -4041,14 +3936,14 @@
           <a:p>
             <a:pPr algn="ctr"/>
             <a:r>
-              <a:rPr lang="en-US" sz="4800" b="1" dirty="0">
+              <a:rPr lang="en-US" sz="3600" b="1" dirty="0">
                 <a:solidFill>
                   <a:srgbClr val="000066"/>
                 </a:solidFill>
               </a:rPr>
-              <a:t>( 1 )</a:t>
-            </a:r>
-            <a:endParaRPr lang="vi-VN" sz="4800" b="1" dirty="0">
+              <a:t>( 1 / 3 )</a:t>
+            </a:r>
+            <a:endParaRPr lang="vi-VN" sz="3600" b="1" dirty="0">
               <a:solidFill>
                 <a:srgbClr val="000066"/>
               </a:solidFill>
@@ -4066,13 +3961,6 @@
   <p:clrMapOvr>
     <a:masterClrMapping/>
   </p:clrMapOvr>
-  <p:timing>
-    <p:tnLst>
-      <p:par>
-        <p:cTn id="1" dur="indefinite" restart="never" nodeType="tmRoot"/>
-      </p:par>
-    </p:tnLst>
-  </p:timing>
 </p:sld>
 </file>
 
@@ -4190,13 +4078,6 @@
   <p:clrMapOvr>
     <a:masterClrMapping/>
   </p:clrMapOvr>
-  <p:timing>
-    <p:tnLst>
-      <p:par>
-        <p:cTn id="1" dur="indefinite" restart="never" nodeType="tmRoot"/>
-      </p:par>
-    </p:tnLst>
-  </p:timing>
 </p:sld>
 </file>
 
@@ -4274,13 +4155,6 @@
               </a:rPr>
               <a:t>只望耶穌引導  我必跟隨主</a:t>
             </a:r>
-            <a:endParaRPr lang="zh-TW" altLang="en-US" sz="6400" b="1" dirty="0">
-              <a:solidFill>
-                <a:srgbClr val="000066"/>
-              </a:solidFill>
-              <a:latin typeface="微軟正黑體" pitchFamily="34" charset="-120"/>
-              <a:ea typeface="微軟正黑體" pitchFamily="34" charset="-120"/>
-            </a:endParaRPr>
           </a:p>
         </p:txBody>
       </p:sp>
@@ -4294,13 +4168,6 @@
   <p:clrMapOvr>
     <a:masterClrMapping/>
   </p:clrMapOvr>
-  <p:timing>
-    <p:tnLst>
-      <p:par>
-        <p:cTn id="1" dur="indefinite" restart="never" nodeType="tmRoot"/>
-      </p:par>
-    </p:tnLst>
-  </p:timing>
 </p:sld>
 </file>
 
@@ -4437,7 +4304,7 @@
         <p:spPr>
           <a:xfrm>
             <a:off x="0" y="5253203"/>
-            <a:ext cx="12192000" cy="830997"/>
+            <a:ext cx="12192000" cy="646331"/>
           </a:xfrm>
           <a:prstGeom prst="rect">
             <a:avLst/>
@@ -4452,14 +4319,14 @@
           <a:p>
             <a:pPr algn="ctr"/>
             <a:r>
-              <a:rPr lang="en-US" sz="4800" b="1" dirty="0">
+              <a:rPr lang="en-US" sz="3600" b="1" dirty="0">
                 <a:solidFill>
                   <a:srgbClr val="000066"/>
                 </a:solidFill>
               </a:rPr>
-              <a:t>( 2 )</a:t>
-            </a:r>
-            <a:endParaRPr lang="vi-VN" sz="4800" b="1" dirty="0">
+              <a:t>( 2 / 3 )</a:t>
+            </a:r>
+            <a:endParaRPr lang="vi-VN" sz="3600" b="1" dirty="0">
               <a:solidFill>
                 <a:srgbClr val="000066"/>
               </a:solidFill>
@@ -4477,13 +4344,6 @@
   <p:clrMapOvr>
     <a:masterClrMapping/>
   </p:clrMapOvr>
-  <p:timing>
-    <p:tnLst>
-      <p:par>
-        <p:cTn id="1" dur="indefinite" restart="never" nodeType="tmRoot"/>
-      </p:par>
-    </p:tnLst>
-  </p:timing>
 </p:sld>
 </file>
 
@@ -4600,7 +4460,7 @@
         <p:spPr>
           <a:xfrm>
             <a:off x="0" y="5253203"/>
-            <a:ext cx="12192000" cy="830997"/>
+            <a:ext cx="12192000" cy="646331"/>
           </a:xfrm>
           <a:prstGeom prst="rect">
             <a:avLst/>
@@ -4615,14 +4475,14 @@
           <a:p>
             <a:pPr algn="ctr"/>
             <a:r>
-              <a:rPr lang="en-US" sz="4800" b="1" dirty="0">
+              <a:rPr lang="en-US" sz="3600" b="1" dirty="0">
                 <a:solidFill>
                   <a:srgbClr val="000066"/>
                 </a:solidFill>
               </a:rPr>
-              <a:t>( 2 )</a:t>
-            </a:r>
-            <a:endParaRPr lang="vi-VN" sz="4800" b="1" dirty="0">
+              <a:t>( 2 / 3 )</a:t>
+            </a:r>
+            <a:endParaRPr lang="vi-VN" sz="3600" b="1" dirty="0">
               <a:solidFill>
                 <a:srgbClr val="000066"/>
               </a:solidFill>
@@ -4640,13 +4500,6 @@
   <p:clrMapOvr>
     <a:masterClrMapping/>
   </p:clrMapOvr>
-  <p:timing>
-    <p:tnLst>
-      <p:par>
-        <p:cTn id="1" dur="indefinite" restart="never" nodeType="tmRoot"/>
-      </p:par>
-    </p:tnLst>
-  </p:timing>
 </p:sld>
 </file>
 
@@ -4764,13 +4617,6 @@
   <p:clrMapOvr>
     <a:masterClrMapping/>
   </p:clrMapOvr>
-  <p:timing>
-    <p:tnLst>
-      <p:par>
-        <p:cTn id="1" dur="indefinite" restart="never" nodeType="tmRoot"/>
-      </p:par>
-    </p:tnLst>
-  </p:timing>
 </p:sld>
 </file>
 
@@ -4848,13 +4694,6 @@
               </a:rPr>
               <a:t>只望耶穌引導  我必跟隨主</a:t>
             </a:r>
-            <a:endParaRPr lang="zh-TW" altLang="en-US" sz="6400" b="1" dirty="0">
-              <a:solidFill>
-                <a:srgbClr val="000066"/>
-              </a:solidFill>
-              <a:latin typeface="微軟正黑體" pitchFamily="34" charset="-120"/>
-              <a:ea typeface="微軟正黑體" pitchFamily="34" charset="-120"/>
-            </a:endParaRPr>
           </a:p>
         </p:txBody>
       </p:sp>
@@ -4868,13 +4707,6 @@
   <p:clrMapOvr>
     <a:masterClrMapping/>
   </p:clrMapOvr>
-  <p:timing>
-    <p:tnLst>
-      <p:par>
-        <p:cTn id="1" dur="indefinite" restart="never" nodeType="tmRoot"/>
-      </p:par>
-    </p:tnLst>
-  </p:timing>
 </p:sld>
 </file>
 
